--- a/ゲーム科3年/00_前期/プロジェクトワーク/卒業研究.pptx
+++ b/ゲーム科3年/00_前期/プロジェクトワーク/卒業研究.pptx
@@ -3674,7 +3674,7 @@
         <p:spPr>
           <a:xfrm>
             <a:off x="567542" y="1216429"/>
-            <a:ext cx="9110186" cy="5262979"/>
+            <a:ext cx="9110186" cy="5632311"/>
           </a:xfrm>
           <a:prstGeom prst="rect">
             <a:avLst/>
@@ -3710,6 +3710,21 @@
                 <a:srgbClr val="FF0000"/>
               </a:solidFill>
             </a:endParaRPr>
+          </a:p>
+          <a:p>
+            <a:r>
+              <a:rPr lang="ja-JP" altLang="en-US" sz="2400" dirty="0"/>
+              <a:t>・</a:t>
+            </a:r>
+            <a:r>
+              <a:rPr lang="en-US" altLang="ja-JP" sz="2400" dirty="0"/>
+              <a:t>1</a:t>
+            </a:r>
+            <a:r>
+              <a:rPr lang="ja-JP" altLang="en-US" sz="2400" dirty="0"/>
+              <a:t>月実施予定の作品展示会に展示</a:t>
+            </a:r>
+            <a:endParaRPr kumimoji="1" lang="en-US" altLang="ja-JP" sz="2400" dirty="0"/>
           </a:p>
           <a:p>
             <a:r>
